--- a/assets/powerpoints/module-achat/C2-quand-ca-va-arriver.pptx
+++ b/assets/powerpoints/module-achat/C2-quand-ca-va-arriver.pptx
@@ -9863,7 +9863,61 @@
                 </a:solidFill>
                 <a:latin typeface="Verdana"/>
               </a:rPr>
-              <a:t>« Ils &lt;b&gt;vont livrer&lt;/b&gt; jeudi. » · « Je &lt;b&gt;vais prendre&lt;/b&gt; l'installation. » · « Nous &lt;b&gt;allons payer&lt;/b&gt; en douze versements. » Aucune forme nouvelle à apprendre : c'est le verbe aller que vous employez déjà.</a:t>
+              <a:t>« Ils </a:t>
+            </a:r>
+            <a:r>
+              <a:rPr sz="2000" b="1" i="0">
+                <a:solidFill>
+                  <a:srgbClr val="4B4F52"/>
+                </a:solidFill>
+                <a:latin typeface="Verdana"/>
+              </a:rPr>
+              <a:t>vont livrer</a:t>
+            </a:r>
+            <a:r>
+              <a:rPr sz="2000" b="0" i="0">
+                <a:solidFill>
+                  <a:srgbClr val="4B4F52"/>
+                </a:solidFill>
+                <a:latin typeface="Verdana"/>
+              </a:rPr>
+              <a:t> jeudi. » · « Je </a:t>
+            </a:r>
+            <a:r>
+              <a:rPr sz="2000" b="1" i="0">
+                <a:solidFill>
+                  <a:srgbClr val="4B4F52"/>
+                </a:solidFill>
+                <a:latin typeface="Verdana"/>
+              </a:rPr>
+              <a:t>vais prendre</a:t>
+            </a:r>
+            <a:r>
+              <a:rPr sz="2000" b="0" i="0">
+                <a:solidFill>
+                  <a:srgbClr val="4B4F52"/>
+                </a:solidFill>
+                <a:latin typeface="Verdana"/>
+              </a:rPr>
+              <a:t> l'installation. » · « Nous </a:t>
+            </a:r>
+            <a:r>
+              <a:rPr sz="2000" b="1" i="0">
+                <a:solidFill>
+                  <a:srgbClr val="4B4F52"/>
+                </a:solidFill>
+                <a:latin typeface="Verdana"/>
+              </a:rPr>
+              <a:t>allons payer</a:t>
+            </a:r>
+            <a:r>
+              <a:rPr sz="2000" b="0" i="0">
+                <a:solidFill>
+                  <a:srgbClr val="4B4F52"/>
+                </a:solidFill>
+                <a:latin typeface="Verdana"/>
+              </a:rPr>
+              <a:t> en douze versements. » Aucune forme nouvelle à apprendre : c'est le verbe aller que vous employez déjà.</a:t>
             </a:r>
           </a:p>
         </p:txBody>
@@ -10210,7 +10264,97 @@
                 </a:solidFill>
                 <a:latin typeface="Verdana"/>
               </a:rPr>
-              <a:t>livrer › je livrer&lt;b&gt;ai&lt;/b&gt;, il livrer&lt;b&gt;a&lt;/b&gt;, ils livrer&lt;b&gt;ont&lt;/b&gt;. Les verbes en &lt;b&gt;-re&lt;/b&gt; perdent leur e : prendre › je prendr&lt;b&gt;ai&lt;/b&gt;. Les terminaisons sont les mêmes pour tous les verbes, sans exception.</a:t>
+              <a:t>livrer › je livrer</a:t>
+            </a:r>
+            <a:r>
+              <a:rPr sz="2000" b="1" i="0">
+                <a:solidFill>
+                  <a:srgbClr val="4B4F52"/>
+                </a:solidFill>
+                <a:latin typeface="Verdana"/>
+              </a:rPr>
+              <a:t>ai</a:t>
+            </a:r>
+            <a:r>
+              <a:rPr sz="2000" b="0" i="0">
+                <a:solidFill>
+                  <a:srgbClr val="4B4F52"/>
+                </a:solidFill>
+                <a:latin typeface="Verdana"/>
+              </a:rPr>
+              <a:t>, il livrer</a:t>
+            </a:r>
+            <a:r>
+              <a:rPr sz="2000" b="1" i="0">
+                <a:solidFill>
+                  <a:srgbClr val="4B4F52"/>
+                </a:solidFill>
+                <a:latin typeface="Verdana"/>
+              </a:rPr>
+              <a:t>a</a:t>
+            </a:r>
+            <a:r>
+              <a:rPr sz="2000" b="0" i="0">
+                <a:solidFill>
+                  <a:srgbClr val="4B4F52"/>
+                </a:solidFill>
+                <a:latin typeface="Verdana"/>
+              </a:rPr>
+              <a:t>, ils livrer</a:t>
+            </a:r>
+            <a:r>
+              <a:rPr sz="2000" b="1" i="0">
+                <a:solidFill>
+                  <a:srgbClr val="4B4F52"/>
+                </a:solidFill>
+                <a:latin typeface="Verdana"/>
+              </a:rPr>
+              <a:t>ont</a:t>
+            </a:r>
+            <a:r>
+              <a:rPr sz="2000" b="0" i="0">
+                <a:solidFill>
+                  <a:srgbClr val="4B4F52"/>
+                </a:solidFill>
+                <a:latin typeface="Verdana"/>
+              </a:rPr>
+              <a:t>. Les verbes en </a:t>
+            </a:r>
+            <a:r>
+              <a:rPr sz="2000" b="1" i="0">
+                <a:solidFill>
+                  <a:srgbClr val="4B4F52"/>
+                </a:solidFill>
+                <a:latin typeface="Verdana"/>
+              </a:rPr>
+              <a:t>-re</a:t>
+            </a:r>
+            <a:r>
+              <a:rPr sz="2000" b="0" i="0">
+                <a:solidFill>
+                  <a:srgbClr val="4B4F52"/>
+                </a:solidFill>
+                <a:latin typeface="Verdana"/>
+              </a:rPr>
+              <a:t> perdent leur e : prendre › je prendr</a:t>
+            </a:r>
+            <a:r>
+              <a:rPr sz="2000" b="1" i="0">
+                <a:solidFill>
+                  <a:srgbClr val="4B4F52"/>
+                </a:solidFill>
+                <a:latin typeface="Verdana"/>
+              </a:rPr>
+              <a:t>ai</a:t>
+            </a:r>
+            <a:r>
+              <a:rPr sz="2000" b="0" i="0">
+                <a:solidFill>
+                  <a:srgbClr val="4B4F52"/>
+                </a:solidFill>
+                <a:latin typeface="Verdana"/>
+              </a:rPr>
+              <a:t>. Les terminaisons sont les mêmes pour tous les verbes, sans exception.</a:t>
             </a:r>
           </a:p>
         </p:txBody>
